--- a/assets/ppts/M3.7_Wireless_LAN_IEEE_802.11.pptx
+++ b/assets/ppts/M3.7_Wireless_LAN_IEEE_802.11.pptx
@@ -3142,8 +3142,8 @@
         </p:nvSpPr>
         <p:spPr>
           <a:xfrm>
-            <a:off x="822960" y="1188720"/>
-            <a:ext cx="164592" cy="4480560"/>
+            <a:off x="0" y="0"/>
+            <a:ext cx="12191695" cy="137160"/>
           </a:xfrm>
           <a:prstGeom prst="rect">
             <a:avLst/>
@@ -3179,14 +3179,57 @@
       </p:sp>
       <p:sp>
         <p:nvSpPr>
-          <p:cNvPr id="4" name="TextBox 3"/>
+          <p:cNvPr id="4" name="Rectangle 3"/>
+          <p:cNvSpPr/>
+          <p:nvPr/>
+        </p:nvSpPr>
+        <p:spPr>
+          <a:xfrm>
+            <a:off x="822960" y="1097280"/>
+            <a:ext cx="164592" cy="4663440"/>
+          </a:xfrm>
+          <a:prstGeom prst="rect">
+            <a:avLst/>
+          </a:prstGeom>
+          <a:solidFill>
+            <a:srgbClr val="D97706"/>
+          </a:solidFill>
+          <a:ln>
+            <a:noFill/>
+          </a:ln>
+        </p:spPr>
+        <p:style>
+          <a:lnRef idx="1">
+            <a:schemeClr val="accent1"/>
+          </a:lnRef>
+          <a:fillRef idx="3">
+            <a:schemeClr val="accent1"/>
+          </a:fillRef>
+          <a:effectRef idx="2">
+            <a:schemeClr val="accent1"/>
+          </a:effectRef>
+          <a:fontRef idx="minor">
+            <a:schemeClr val="lt1"/>
+          </a:fontRef>
+        </p:style>
+        <p:txBody>
+          <a:bodyPr rtlCol="0" anchor="ctr"/>
+          <a:lstStyle/>
+          <a:p>
+            <a:pPr algn="ctr"/>
+          </a:p>
+        </p:txBody>
+      </p:sp>
+      <p:sp>
+        <p:nvSpPr>
+          <p:cNvPr id="5" name="TextBox 4"/>
           <p:cNvSpPr txBox="1"/>
           <p:nvPr/>
         </p:nvSpPr>
         <p:spPr>
           <a:xfrm>
-            <a:off x="1280160" y="1097280"/>
-            <a:ext cx="10058400" cy="4663440"/>
+            <a:off x="1234440" y="1005840"/>
+            <a:ext cx="10241280" cy="4846320"/>
           </a:xfrm>
           <a:prstGeom prst="rect">
             <a:avLst/>
@@ -3201,70 +3244,165 @@
           <a:p>
             <a:pPr>
               <a:spcAft>
+                <a:spcPts val="1000"/>
+              </a:spcAft>
+              <a:defRPr b="1" sz="1300">
+                <a:solidFill>
+                  <a:srgbClr val="D97706"/>
+                </a:solidFill>
+              </a:defRPr>
+            </a:pPr>
+            <a:r>
+              <a:t>PCCST501 Computer Networks | KTU 2024 Scheme • MODULE 3 • M3.7</a:t>
+            </a:r>
+          </a:p>
+          <a:p>
+            <a:pPr>
+              <a:spcAft>
                 <a:spcPts val="1200"/>
               </a:spcAft>
-              <a:defRPr b="1" sz="1300">
-                <a:solidFill>
-                  <a:srgbClr val="D97706"/>
-                </a:solidFill>
-              </a:defRPr>
-            </a:pPr>
-            <a:r>
-              <a:t>PCCST501 Computer Networks | KTU 2024 Scheme • MODULE 3 • M3.7</a:t>
+              <a:defRPr b="1" sz="3000">
+                <a:solidFill>
+                  <a:srgbClr val="F8FAFC"/>
+                </a:solidFill>
+              </a:defRPr>
+            </a:pPr>
+            <a:r>
+              <a:t>Wireless LANs: IEEE 802.11 (Wi-Fi) Architecture</a:t>
             </a:r>
           </a:p>
           <a:p>
             <a:pPr>
               <a:spcAft>
-                <a:spcPts val="1400"/>
+                <a:spcPts val="2400"/>
               </a:spcAft>
-              <a:defRPr b="1" sz="3200">
-                <a:solidFill>
-                  <a:srgbClr val="F8FAFC"/>
-                </a:solidFill>
-              </a:defRPr>
-            </a:pPr>
-            <a:r>
-              <a:t>Wireless LANs (IEEE 802.11 Wi-Fi)</a:t>
+              <a:defRPr sz="1600">
+                <a:solidFill>
+                  <a:srgbClr val="94A3B8"/>
+                </a:solidFill>
+              </a:defRPr>
+            </a:pPr>
+            <a:r>
+              <a:t>BSS, AP, ESS, Distribution System, Hidden/Exposed Terminal Problems, CSMA/CA with RTS/CTS, SIFS/PIFS/DIFS, 802.11 Frame (4 Addresses)</a:t>
             </a:r>
           </a:p>
           <a:p>
             <a:pPr>
               <a:spcAft>
-                <a:spcPts val="2800"/>
+                <a:spcPts val="300"/>
               </a:spcAft>
-              <a:defRPr sz="1700">
+              <a:defRPr b="1" sz="1350">
+                <a:solidFill>
+                  <a:srgbClr val="E2E8F0"/>
+                </a:solidFill>
+              </a:defRPr>
+            </a:pPr>
+            <a:r>
+              <a:t>Prepared by: Prof. Anju Markose | Assistant Professor, Dept. of CSE | VJCET</a:t>
+            </a:r>
+          </a:p>
+          <a:p>
+            <a:pPr>
+              <a:defRPr sz="1150">
                 <a:solidFill>
                   <a:srgbClr val="94A3B8"/>
                 </a:solidFill>
               </a:defRPr>
             </a:pPr>
             <a:r>
-              <a:t>Architecture (BSS, ESS, AP), CSMA/CA Protocol, NAV, IFS, Hidden/Exposed Terminals, RTS/CTS &amp; Wi-Fi Standards</a:t>
-            </a:r>
-          </a:p>
+              <a:t>Viswajyothi College of Engineering and Technology (VJCET), Vazhakulam • KTU S5 CSE</a:t>
+            </a:r>
+          </a:p>
+        </p:txBody>
+      </p:sp>
+      <p:sp>
+        <p:nvSpPr>
+          <p:cNvPr id="6" name="Rounded Rectangle 5"/>
+          <p:cNvSpPr/>
+          <p:nvPr/>
+        </p:nvSpPr>
+        <p:spPr>
+          <a:xfrm>
+            <a:off x="8412480" y="5120640"/>
+            <a:ext cx="3017520" cy="822960"/>
+          </a:xfrm>
+          <a:prstGeom prst="roundRect">
+            <a:avLst/>
+          </a:prstGeom>
+          <a:solidFill>
+            <a:srgbClr val="1E293B"/>
+          </a:solidFill>
+          <a:ln w="12700">
+            <a:solidFill>
+              <a:srgbClr val="0E7490"/>
+            </a:solidFill>
+          </a:ln>
+        </p:spPr>
+        <p:style>
+          <a:lnRef idx="1">
+            <a:schemeClr val="accent1"/>
+          </a:lnRef>
+          <a:fillRef idx="3">
+            <a:schemeClr val="accent1"/>
+          </a:fillRef>
+          <a:effectRef idx="2">
+            <a:schemeClr val="accent1"/>
+          </a:effectRef>
+          <a:fontRef idx="minor">
+            <a:schemeClr val="lt1"/>
+          </a:fontRef>
+        </p:style>
+        <p:txBody>
+          <a:bodyPr rtlCol="0" anchor="ctr"/>
+          <a:lstStyle/>
+          <a:p>
+            <a:pPr algn="ctr"/>
+          </a:p>
+        </p:txBody>
+      </p:sp>
+      <p:sp>
+        <p:nvSpPr>
+          <p:cNvPr id="7" name="TextBox 6"/>
+          <p:cNvSpPr txBox="1"/>
+          <p:nvPr/>
+        </p:nvSpPr>
+        <p:spPr>
+          <a:xfrm>
+            <a:off x="8503920" y="5166360"/>
+            <a:ext cx="2834640" cy="731520"/>
+          </a:xfrm>
+          <a:prstGeom prst="rect">
+            <a:avLst/>
+          </a:prstGeom>
+          <a:noFill/>
+        </p:spPr>
+        <p:txBody>
+          <a:bodyPr wrap="none">
+            <a:spAutoFit/>
+          </a:bodyPr>
+          <a:lstStyle/>
           <a:p>
             <a:pPr>
-              <a:defRPr b="1" sz="1300">
-                <a:solidFill>
-                  <a:srgbClr val="E2E8F0"/>
-                </a:solidFill>
-              </a:defRPr>
-            </a:pPr>
-            <a:r>
-              <a:t>Prepared by: Prof. Anju Markose | Assistant Professor, Dept. of CSE | VJCET</a:t>
+              <a:defRPr b="1" sz="1050">
+                <a:solidFill>
+                  <a:srgbClr val="D97706"/>
+                </a:solidFill>
+              </a:defRPr>
+            </a:pPr>
+            <a:r>
+              <a:t>KTU B.Tech Curriculum</a:t>
             </a:r>
           </a:p>
           <a:p>
             <a:pPr>
-              <a:defRPr sz="1100">
-                <a:solidFill>
-                  <a:srgbClr val="94A3B8"/>
-                </a:solidFill>
-              </a:defRPr>
-            </a:pPr>
-            <a:r>
-              <a:t>Viswajyothi College of Engineering and Technology (VJCET), Vazhakulam</a:t>
+              <a:defRPr sz="950">
+                <a:solidFill>
+                  <a:srgbClr val="F8FAFC"/>
+                </a:solidFill>
+              </a:defRPr>
+            </a:pPr>
+            <a:r>
+              <a:t>Official Classroom Slide Deck</a:t>
             </a:r>
           </a:p>
         </p:txBody>
@@ -3396,14 +3534,14 @@
           <a:lstStyle/>
           <a:p>
             <a:pPr>
-              <a:defRPr b="1" sz="2300">
+              <a:defRPr b="1" sz="2200">
                 <a:solidFill>
                   <a:srgbClr val="F8FAFC"/>
                 </a:solidFill>
               </a:defRPr>
             </a:pPr>
             <a:r>
-              <a:t>3.7.1 IEEE 802.11 Wi-Fi Architecture</a:t>
+              <a:t>3.7.1 IEEE 802.11 Architecture &amp; Terminal Problems</a:t>
             </a:r>
           </a:p>
         </p:txBody>
@@ -3438,7 +3576,7 @@
               </a:defRPr>
             </a:pPr>
             <a:r>
-              <a:t>M3.7 802.11 ARCHITECTURE</a:t>
+              <a:t>M3.7 WIRELESS ARCHITECTURE</a:t>
             </a:r>
           </a:p>
         </p:txBody>
@@ -3451,7 +3589,7 @@
         </p:nvSpPr>
         <p:spPr>
           <a:xfrm>
-            <a:off x="731520" y="1280160"/>
+            <a:off x="731520" y="1234440"/>
             <a:ext cx="6858000" cy="4937760"/>
           </a:xfrm>
           <a:prstGeom prst="rect">
@@ -3469,7 +3607,7 @@
               <a:spcAft>
                 <a:spcPts val="200"/>
               </a:spcAft>
-              <a:defRPr b="1" sz="1500">
+              <a:defRPr b="1" sz="1450">
                 <a:solidFill>
                   <a:srgbClr val="0F1E4A"/>
                 </a:solidFill>
@@ -3482,16 +3620,16 @@
           <a:p>
             <a:pPr>
               <a:spcAft>
-                <a:spcPts val="800"/>
+                <a:spcPts val="700"/>
               </a:spcAft>
-              <a:defRPr sz="1300">
-                <a:solidFill>
-                  <a:srgbClr val="1E293B"/>
-                </a:solidFill>
-              </a:defRPr>
-            </a:pPr>
-            <a:r>
-              <a:t>   Building block of 802.11. Consists of wireless stations. Infrastructure BSS includes a central Access Point (AP); Ad-hoc / IBSS has peer-to-peer communication without an AP.</a:t>
+              <a:defRPr sz="1250">
+                <a:solidFill>
+                  <a:srgbClr val="0F172A"/>
+                </a:solidFill>
+              </a:defRPr>
+            </a:pPr>
+            <a:r>
+              <a:t>   The fundamental building block consisting of wireless stations and a central Access Point (AP) in Infrastructure mode (or peer-to-peer in Ad-hoc / IBSS mode).</a:t>
             </a:r>
           </a:p>
           <a:p>
@@ -3499,7 +3637,7 @@
               <a:spcAft>
                 <a:spcPts val="200"/>
               </a:spcAft>
-              <a:defRPr b="1" sz="1500">
+              <a:defRPr b="1" sz="1450">
                 <a:solidFill>
                   <a:srgbClr val="0F1E4A"/>
                 </a:solidFill>
@@ -3512,16 +3650,16 @@
           <a:p>
             <a:pPr>
               <a:spcAft>
-                <a:spcPts val="800"/>
+                <a:spcPts val="700"/>
               </a:spcAft>
-              <a:defRPr sz="1300">
-                <a:solidFill>
-                  <a:srgbClr val="1E293B"/>
-                </a:solidFill>
-              </a:defRPr>
-            </a:pPr>
-            <a:r>
-              <a:t>   Two or more BSSs interconnected by a wired Distribution System (DS / Ethernet switch backbone) sharing a common SSID, enabling seamless mobile client roaming.</a:t>
+              <a:defRPr sz="1250">
+                <a:solidFill>
+                  <a:srgbClr val="0F172A"/>
+                </a:solidFill>
+              </a:defRPr>
+            </a:pPr>
+            <a:r>
+              <a:t>   Multiple BSSs interconnected via a wired Distribution System (DS) sharing a common SSID, enabling seamless roaming across campus.</a:t>
             </a:r>
           </a:p>
           <a:p>
@@ -3529,29 +3667,29 @@
               <a:spcAft>
                 <a:spcPts val="200"/>
               </a:spcAft>
-              <a:defRPr b="1" sz="1500">
+              <a:defRPr b="1" sz="1450">
                 <a:solidFill>
                   <a:srgbClr val="0F1E4A"/>
                 </a:solidFill>
               </a:defRPr>
             </a:pPr>
             <a:r>
-              <a:t>• Service Set Identifier (SSID)</a:t>
+              <a:t>• Hidden Terminal Problem</a:t>
             </a:r>
           </a:p>
           <a:p>
             <a:pPr>
               <a:spcAft>
-                <a:spcPts val="800"/>
+                <a:spcPts val="700"/>
               </a:spcAft>
-              <a:defRPr sz="1300">
-                <a:solidFill>
-                  <a:srgbClr val="1E293B"/>
-                </a:solidFill>
-              </a:defRPr>
-            </a:pPr>
-            <a:r>
-              <a:t>   Human-readable name of the wireless network (up to 32 characters) advertised in Periodic Beacon frames by APs.</a:t>
+              <a:defRPr sz="1250">
+                <a:solidFill>
+                  <a:srgbClr val="0F172A"/>
+                </a:solidFill>
+              </a:defRPr>
+            </a:pPr>
+            <a:r>
+              <a:t>   Nodes A and C cannot hear each other due to distance or physical obstacles, but both are in range of AP B. If A and C transmit simultaneously, their frames collide at B!</a:t>
             </a:r>
           </a:p>
           <a:p>
@@ -3559,29 +3697,59 @@
               <a:spcAft>
                 <a:spcPts val="200"/>
               </a:spcAft>
-              <a:defRPr b="1" sz="1500">
+              <a:defRPr b="1" sz="1450">
                 <a:solidFill>
                   <a:srgbClr val="0F1E4A"/>
                 </a:solidFill>
               </a:defRPr>
             </a:pPr>
             <a:r>
-              <a:t>• BSSID</a:t>
+              <a:t>• Exposed Terminal Problem</a:t>
             </a:r>
           </a:p>
           <a:p>
             <a:pPr>
               <a:spcAft>
-                <a:spcPts val="800"/>
+                <a:spcPts val="700"/>
               </a:spcAft>
-              <a:defRPr sz="1300">
-                <a:solidFill>
-                  <a:srgbClr val="1E293B"/>
-                </a:solidFill>
-              </a:defRPr>
-            </a:pPr>
-            <a:r>
-              <a:t>   The 48-bit MAC address of the Access Point's wireless radio interface.</a:t>
+              <a:defRPr sz="1250">
+                <a:solidFill>
+                  <a:srgbClr val="0F172A"/>
+                </a:solidFill>
+              </a:defRPr>
+            </a:pPr>
+            <a:r>
+              <a:t>   Node B is transmitting to A. Node C wants to transmit to D (away from A). C senses B transmitting and unnecessarily defers, wasting channel capacity.</a:t>
+            </a:r>
+          </a:p>
+          <a:p>
+            <a:pPr>
+              <a:spcAft>
+                <a:spcPts val="200"/>
+              </a:spcAft>
+              <a:defRPr b="1" sz="1450">
+                <a:solidFill>
+                  <a:srgbClr val="0F1E4A"/>
+                </a:solidFill>
+              </a:defRPr>
+            </a:pPr>
+            <a:r>
+              <a:t>• Solution: CSMA/CA with RTS/CTS Handshake</a:t>
+            </a:r>
+          </a:p>
+          <a:p>
+            <a:pPr>
+              <a:spcAft>
+                <a:spcPts val="700"/>
+              </a:spcAft>
+              <a:defRPr sz="1250">
+                <a:solidFill>
+                  <a:srgbClr val="0F172A"/>
+                </a:solidFill>
+              </a:defRPr>
+            </a:pPr>
+            <a:r>
+              <a:t>   Sender transmits short **RTS (Request to Send)** frame (20B). AP replies with **CTS (Clear to Send)** broadcast (14B) containing Network Allocation Vector (NAV) reservation time, silencing hidden terminals.</a:t>
             </a:r>
           </a:p>
         </p:txBody>
@@ -3594,14 +3762,14 @@
         </p:nvSpPr>
         <p:spPr>
           <a:xfrm>
-            <a:off x="7955279" y="1280160"/>
-            <a:ext cx="3566160" cy="4846320"/>
+            <a:off x="7955279" y="1234440"/>
+            <a:ext cx="3566160" cy="4892040"/>
           </a:xfrm>
           <a:prstGeom prst="roundRect">
             <a:avLst/>
           </a:prstGeom>
           <a:solidFill>
-            <a:srgbClr val="F1F5F9"/>
+            <a:srgbClr val="F8FAFC"/>
           </a:solidFill>
           <a:ln w="19050">
             <a:solidFill>
@@ -3639,7 +3807,7 @@
         </p:nvSpPr>
         <p:spPr>
           <a:xfrm>
-            <a:off x="8138160" y="1417320"/>
+            <a:off x="8138160" y="1371600"/>
             <a:ext cx="3200400" cy="4572000"/>
           </a:xfrm>
           <a:prstGeom prst="rect">
@@ -3664,7 +3832,7 @@
               </a:defRPr>
             </a:pPr>
             <a:r>
-              <a:t>Wi-Fi Topologies</a:t>
+              <a:t>802.11 Topology</a:t>
             </a:r>
           </a:p>
           <a:p>
@@ -3674,12 +3842,12 @@
               </a:spcAft>
               <a:defRPr sz="1200">
                 <a:solidFill>
-                  <a:srgbClr val="1E293B"/>
-                </a:solidFill>
-              </a:defRPr>
-            </a:pPr>
-            <a:r>
-              <a:t>→ Infrastructure Mode: With AP</a:t>
+                  <a:srgbClr val="0F172A"/>
+                </a:solidFill>
+              </a:defRPr>
+            </a:pPr>
+            <a:r>
+              <a:t>→ BSS: AP + Associated Stations</a:t>
             </a:r>
           </a:p>
           <a:p>
@@ -3689,12 +3857,12 @@
               </a:spcAft>
               <a:defRPr sz="1200">
                 <a:solidFill>
-                  <a:srgbClr val="1E293B"/>
-                </a:solidFill>
-              </a:defRPr>
-            </a:pPr>
-            <a:r>
-              <a:t>→ Ad-hoc Mode: Peer-to-peer (IBSS)</a:t>
+                  <a:srgbClr val="0F172A"/>
+                </a:solidFill>
+              </a:defRPr>
+            </a:pPr>
+            <a:r>
+              <a:t>→ ESS: Multiple BSSs + Wired DS</a:t>
             </a:r>
           </a:p>
           <a:p>
@@ -3704,12 +3872,12 @@
               </a:spcAft>
               <a:defRPr sz="1200">
                 <a:solidFill>
-                  <a:srgbClr val="1E293B"/>
-                </a:solidFill>
-              </a:defRPr>
-            </a:pPr>
-            <a:r>
-              <a:t>→ ESS: Multiple APs on wired DS</a:t>
+                  <a:srgbClr val="0F172A"/>
+                </a:solidFill>
+              </a:defRPr>
+            </a:pPr>
+            <a:r>
+              <a:t>→ Hidden Terminal: Collisions at AP</a:t>
             </a:r>
           </a:p>
           <a:p>
@@ -3719,12 +3887,12 @@
               </a:spcAft>
               <a:defRPr sz="1200">
                 <a:solidFill>
-                  <a:srgbClr val="1E293B"/>
-                </a:solidFill>
-              </a:defRPr>
-            </a:pPr>
-            <a:r>
-              <a:t>→ SSID: Network broadcast name</a:t>
+                  <a:srgbClr val="0F172A"/>
+                </a:solidFill>
+              </a:defRPr>
+            </a:pPr>
+            <a:r>
+              <a:t>→ RTS/CTS: Virtual carrier sensing</a:t>
             </a:r>
           </a:p>
           <a:p>
@@ -3734,12 +3902,12 @@
               </a:spcAft>
               <a:defRPr sz="1200">
                 <a:solidFill>
-                  <a:srgbClr val="1E293B"/>
-                </a:solidFill>
-              </a:defRPr>
-            </a:pPr>
-            <a:r>
-              <a:t>→ BSSID: 48-bit AP MAC address</a:t>
+                  <a:srgbClr val="0F172A"/>
+                </a:solidFill>
+              </a:defRPr>
+            </a:pPr>
+            <a:r>
+              <a:t>→ NAV: Channel reservation timer</a:t>
             </a:r>
           </a:p>
         </p:txBody>
@@ -3752,8 +3920,8 @@
         </p:nvSpPr>
         <p:spPr>
           <a:xfrm>
-            <a:off x="731520" y="6309360"/>
-            <a:ext cx="10789920" cy="365760"/>
+            <a:off x="731520" y="6327648"/>
+            <a:ext cx="10789920" cy="320040"/>
           </a:xfrm>
           <a:prstGeom prst="rect">
             <a:avLst/>
@@ -3775,6 +3943,41 @@
             </a:pPr>
             <a:r>
               <a:t>PCCST501 Computer Networks | KTU 2024 Scheme | Prof. Anju Markose | Assistant Professor, Dept. of CSE | VJCET</a:t>
+            </a:r>
+          </a:p>
+        </p:txBody>
+      </p:sp>
+      <p:sp>
+        <p:nvSpPr>
+          <p:cNvPr id="10" name="TextBox 9"/>
+          <p:cNvSpPr txBox="1"/>
+          <p:nvPr/>
+        </p:nvSpPr>
+        <p:spPr>
+          <a:xfrm>
+            <a:off x="6858000" y="6327648"/>
+            <a:ext cx="4572000" cy="320040"/>
+          </a:xfrm>
+          <a:prstGeom prst="rect">
+            <a:avLst/>
+          </a:prstGeom>
+          <a:noFill/>
+        </p:spPr>
+        <p:txBody>
+          <a:bodyPr wrap="none">
+            <a:spAutoFit/>
+          </a:bodyPr>
+          <a:lstStyle/>
+          <a:p>
+            <a:pPr algn="r">
+              <a:defRPr sz="950">
+                <a:solidFill>
+                  <a:srgbClr val="64748B"/>
+                </a:solidFill>
+              </a:defRPr>
+            </a:pPr>
+            <a:r>
+              <a:t>Dept. of CSE, VJCET</a:t>
             </a:r>
           </a:p>
         </p:txBody>
@@ -3906,14 +4109,14 @@
           <a:lstStyle/>
           <a:p>
             <a:pPr>
-              <a:defRPr b="1" sz="2300">
+              <a:defRPr b="1" sz="2200">
                 <a:solidFill>
                   <a:srgbClr val="F8FAFC"/>
                 </a:solidFill>
               </a:defRPr>
             </a:pPr>
             <a:r>
-              <a:t>3.7.2 CSMA/CA &amp; Inter-Frame Spaces (IFS)</a:t>
+              <a:t>3.7.2 CSMA/CA Protocol Timing Intervals &amp; 4-Address Frame</a:t>
             </a:r>
           </a:p>
         </p:txBody>
@@ -3948,7 +4151,7 @@
               </a:defRPr>
             </a:pPr>
             <a:r>
-              <a:t>M3.7 CSMA/CA &amp; IFS</a:t>
+              <a:t>M3.7 CSMA/CA TIMING</a:t>
             </a:r>
           </a:p>
         </p:txBody>
@@ -3961,7 +4164,7 @@
         </p:nvSpPr>
         <p:spPr>
           <a:xfrm>
-            <a:off x="731520" y="1280160"/>
+            <a:off x="731520" y="1234440"/>
             <a:ext cx="6858000" cy="4937760"/>
           </a:xfrm>
           <a:prstGeom prst="rect">
@@ -3979,29 +4182,29 @@
               <a:spcAft>
                 <a:spcPts val="200"/>
               </a:spcAft>
-              <a:defRPr b="1" sz="1500">
+              <a:defRPr b="1" sz="1450">
                 <a:solidFill>
                   <a:srgbClr val="0F1E4A"/>
                 </a:solidFill>
               </a:defRPr>
             </a:pPr>
             <a:r>
-              <a:t>• Why CSMA/CD Fails in Wireless</a:t>
+              <a:t>• Inter-Frame Space (IFS) Hierarchy</a:t>
             </a:r>
           </a:p>
           <a:p>
             <a:pPr>
               <a:spcAft>
-                <a:spcPts val="800"/>
+                <a:spcPts val="700"/>
               </a:spcAft>
-              <a:defRPr sz="1300">
-                <a:solidFill>
-                  <a:srgbClr val="1E293B"/>
-                </a:solidFill>
-              </a:defRPr>
-            </a:pPr>
-            <a:r>
-              <a:t>   1. Wireless radios cannot transmit and receive simultaneously on same channel (half-duplex). 2. Signal attenuation makes collision detection impossible at sender $\implies$ Wi-Fi uses Collision AVOIDANCE (CSMA/CA).</a:t>
+              <a:defRPr sz="1250">
+                <a:solidFill>
+                  <a:srgbClr val="0F172A"/>
+                </a:solidFill>
+              </a:defRPr>
+            </a:pPr>
+            <a:r>
+              <a:t>   1. **SIFS (Short IFS)**: Highest priority; used for immediate ACKs, CTS, and fragmented frames. \n 2. **PIFS (PCF IFS)**: Medium priority; used in polling mode. \n 3. **DIFS (DCF IFS)**: Standard priority; minimum wait time before station can contend for channel.</a:t>
             </a:r>
           </a:p>
           <a:p>
@@ -4009,29 +4212,29 @@
               <a:spcAft>
                 <a:spcPts val="200"/>
               </a:spcAft>
-              <a:defRPr b="1" sz="1500">
+              <a:defRPr b="1" sz="1450">
                 <a:solidFill>
                   <a:srgbClr val="0F1E4A"/>
                 </a:solidFill>
               </a:defRPr>
             </a:pPr>
             <a:r>
-              <a:t>• CSMA/CA Protocol Flow</a:t>
+              <a:t>• Contention Window (CW) &amp; Backoff</a:t>
             </a:r>
           </a:p>
           <a:p>
             <a:pPr>
               <a:spcAft>
-                <a:spcPts val="800"/>
+                <a:spcPts val="700"/>
               </a:spcAft>
-              <a:defRPr sz="1300">
-                <a:solidFill>
-                  <a:srgbClr val="1E293B"/>
-                </a:solidFill>
-              </a:defRPr>
-            </a:pPr>
-            <a:r>
-              <a:t>   Station senses medium. If idle for DIFS, it selects random backoff slot count. Decrements counter while medium idle. Transmits when counter reaches 0. Receiver sends ACK after SIFS.</a:t>
+              <a:defRPr sz="1250">
+                <a:solidFill>
+                  <a:srgbClr val="0F172A"/>
+                </a:solidFill>
+              </a:defRPr>
+            </a:pPr>
+            <a:r>
+              <a:t>   Station waits DIFS; if idle, selects random backoff slot in $[0, CW]$. Counts down while channel is idle; freezes counter during busy periods.</a:t>
             </a:r>
           </a:p>
           <a:p>
@@ -4039,59 +4242,29 @@
               <a:spcAft>
                 <a:spcPts val="200"/>
               </a:spcAft>
-              <a:defRPr b="1" sz="1500">
+              <a:defRPr b="1" sz="1450">
                 <a:solidFill>
                   <a:srgbClr val="0F1E4A"/>
                 </a:solidFill>
               </a:defRPr>
             </a:pPr>
             <a:r>
-              <a:t>• Inter-Frame Spaces (IFS Hierarchy)</a:t>
+              <a:t>• IEEE 802.11 4-Address Frame Format</a:t>
             </a:r>
           </a:p>
           <a:p>
             <a:pPr>
               <a:spcAft>
-                <a:spcPts val="800"/>
+                <a:spcPts val="700"/>
               </a:spcAft>
-              <a:defRPr sz="1300">
-                <a:solidFill>
-                  <a:srgbClr val="1E293B"/>
-                </a:solidFill>
-              </a:defRPr>
-            </a:pPr>
-            <a:r>
-              <a:t>   SIFS (Short IFS - highest priority for ACKs/CTS) &lt; PIFS (PCF IFS) &lt; DIFS (DCF IFS - standard data frames).</a:t>
-            </a:r>
-          </a:p>
-          <a:p>
-            <a:pPr>
-              <a:spcAft>
-                <a:spcPts val="200"/>
-              </a:spcAft>
-              <a:defRPr b="1" sz="1500">
-                <a:solidFill>
-                  <a:srgbClr val="0F1E4A"/>
-                </a:solidFill>
-              </a:defRPr>
-            </a:pPr>
-            <a:r>
-              <a:t>• Network Allocation Vector (NAV)</a:t>
-            </a:r>
-          </a:p>
-          <a:p>
-            <a:pPr>
-              <a:spcAft>
-                <a:spcPts val="800"/>
-              </a:spcAft>
-              <a:defRPr sz="1300">
-                <a:solidFill>
-                  <a:srgbClr val="1E293B"/>
-                </a:solidFill>
-              </a:defRPr>
-            </a:pPr>
-            <a:r>
-              <a:t>   Virtual carrier sensing. Frames carry a `Duration` field. Stations hearing duration set their internal NAV timer and refrain from transmitting until NAV expires.</a:t>
+              <a:defRPr sz="1250">
+                <a:solidFill>
+                  <a:srgbClr val="0F172A"/>
+                </a:solidFill>
+              </a:defRPr>
+            </a:pPr>
+            <a:r>
+              <a:t>   Frame Control (2B) | Duration/ID (2B) | Address 1 (6B: Receiver MAC) | Address 2 (6B: Transmitter MAC) | Address 3 (6B: Original Source or Final Dest MAC) | Sequence Control (2B) | Address 4 (6B: Used strictly when bridging across WDS wireless distribution links) | Payload (0-2312B) | FCS (4B).</a:t>
             </a:r>
           </a:p>
         </p:txBody>
@@ -4104,14 +4277,14 @@
         </p:nvSpPr>
         <p:spPr>
           <a:xfrm>
-            <a:off x="7955279" y="1280160"/>
-            <a:ext cx="3566160" cy="4846320"/>
+            <a:off x="7955279" y="1234440"/>
+            <a:ext cx="3566160" cy="4892040"/>
           </a:xfrm>
           <a:prstGeom prst="roundRect">
             <a:avLst/>
           </a:prstGeom>
           <a:solidFill>
-            <a:srgbClr val="F1F5F9"/>
+            <a:srgbClr val="F8FAFC"/>
           </a:solidFill>
           <a:ln w="19050">
             <a:solidFill>
@@ -4149,7 +4322,7 @@
         </p:nvSpPr>
         <p:spPr>
           <a:xfrm>
-            <a:off x="8138160" y="1417320"/>
+            <a:off x="8138160" y="1371600"/>
             <a:ext cx="3200400" cy="4572000"/>
           </a:xfrm>
           <a:prstGeom prst="rect">
@@ -4174,7 +4347,7 @@
               </a:defRPr>
             </a:pPr>
             <a:r>
-              <a:t>IFS Priority Hierarchy</a:t>
+              <a:t>Timing Hierarchy</a:t>
             </a:r>
           </a:p>
           <a:p>
@@ -4184,12 +4357,12 @@
               </a:spcAft>
               <a:defRPr sz="1200">
                 <a:solidFill>
-                  <a:srgbClr val="1E293B"/>
-                </a:solidFill>
-              </a:defRPr>
-            </a:pPr>
-            <a:r>
-              <a:t>→ 1. SIFS: Lowest delay (ACK / CTS)</a:t>
+                  <a:srgbClr val="0F172A"/>
+                </a:solidFill>
+              </a:defRPr>
+            </a:pPr>
+            <a:r>
+              <a:t>→ SIFS &lt; PIFS &lt; DIFS &lt; EIFS</a:t>
             </a:r>
           </a:p>
           <a:p>
@@ -4199,12 +4372,12 @@
               </a:spcAft>
               <a:defRPr sz="1200">
                 <a:solidFill>
-                  <a:srgbClr val="1E293B"/>
-                </a:solidFill>
-              </a:defRPr>
-            </a:pPr>
-            <a:r>
-              <a:t>→ 2. PIFS: Medium delay (Polling)</a:t>
+                  <a:srgbClr val="0F172A"/>
+                </a:solidFill>
+              </a:defRPr>
+            </a:pPr>
+            <a:r>
+              <a:t>→ SIFS: ACKs &amp; CTS (Highest priority)</a:t>
             </a:r>
           </a:p>
           <a:p>
@@ -4214,12 +4387,12 @@
               </a:spcAft>
               <a:defRPr sz="1200">
                 <a:solidFill>
-                  <a:srgbClr val="1E293B"/>
-                </a:solidFill>
-              </a:defRPr>
-            </a:pPr>
-            <a:r>
-              <a:t>→ 3. DIFS: Highest delay (Data frames)</a:t>
+                  <a:srgbClr val="0F172A"/>
+                </a:solidFill>
+              </a:defRPr>
+            </a:pPr>
+            <a:r>
+              <a:t>→ DIFS: Standard data contention</a:t>
             </a:r>
           </a:p>
           <a:p>
@@ -4229,12 +4402,12 @@
               </a:spcAft>
               <a:defRPr sz="1200">
                 <a:solidFill>
-                  <a:srgbClr val="1E293B"/>
-                </a:solidFill>
-              </a:defRPr>
-            </a:pPr>
-            <a:r>
-              <a:t>→ NAV: Virtual countdown timer</a:t>
+                  <a:srgbClr val="0F172A"/>
+                </a:solidFill>
+              </a:defRPr>
+            </a:pPr>
+            <a:r>
+              <a:t>→ Addr 1: Immediate Receiver</a:t>
             </a:r>
           </a:p>
           <a:p>
@@ -4244,12 +4417,42 @@
               </a:spcAft>
               <a:defRPr sz="1200">
                 <a:solidFill>
-                  <a:srgbClr val="1E293B"/>
-                </a:solidFill>
-              </a:defRPr>
-            </a:pPr>
-            <a:r>
-              <a:t>→ Exponential Contention Window</a:t>
+                  <a:srgbClr val="0F172A"/>
+                </a:solidFill>
+              </a:defRPr>
+            </a:pPr>
+            <a:r>
+              <a:t>→ Addr 2: Immediate Transmitter</a:t>
+            </a:r>
+          </a:p>
+          <a:p>
+            <a:pPr>
+              <a:spcAft>
+                <a:spcPts val="600"/>
+              </a:spcAft>
+              <a:defRPr sz="1200">
+                <a:solidFill>
+                  <a:srgbClr val="0F172A"/>
+                </a:solidFill>
+              </a:defRPr>
+            </a:pPr>
+            <a:r>
+              <a:t>→ Addr 3: Original Source / Dest</a:t>
+            </a:r>
+          </a:p>
+          <a:p>
+            <a:pPr>
+              <a:spcAft>
+                <a:spcPts val="600"/>
+              </a:spcAft>
+              <a:defRPr sz="1200">
+                <a:solidFill>
+                  <a:srgbClr val="0F172A"/>
+                </a:solidFill>
+              </a:defRPr>
+            </a:pPr>
+            <a:r>
+              <a:t>→ Addr 4: WDS Wireless Bridge</a:t>
             </a:r>
           </a:p>
         </p:txBody>
@@ -4262,8 +4465,8 @@
         </p:nvSpPr>
         <p:spPr>
           <a:xfrm>
-            <a:off x="731520" y="6309360"/>
-            <a:ext cx="10789920" cy="365760"/>
+            <a:off x="731520" y="6327648"/>
+            <a:ext cx="10789920" cy="320040"/>
           </a:xfrm>
           <a:prstGeom prst="rect">
             <a:avLst/>
@@ -4285,6 +4488,41 @@
             </a:pPr>
             <a:r>
               <a:t>PCCST501 Computer Networks | KTU 2024 Scheme | Prof. Anju Markose | Assistant Professor, Dept. of CSE | VJCET</a:t>
+            </a:r>
+          </a:p>
+        </p:txBody>
+      </p:sp>
+      <p:sp>
+        <p:nvSpPr>
+          <p:cNvPr id="10" name="TextBox 9"/>
+          <p:cNvSpPr txBox="1"/>
+          <p:nvPr/>
+        </p:nvSpPr>
+        <p:spPr>
+          <a:xfrm>
+            <a:off x="6858000" y="6327648"/>
+            <a:ext cx="4572000" cy="320040"/>
+          </a:xfrm>
+          <a:prstGeom prst="rect">
+            <a:avLst/>
+          </a:prstGeom>
+          <a:noFill/>
+        </p:spPr>
+        <p:txBody>
+          <a:bodyPr wrap="none">
+            <a:spAutoFit/>
+          </a:bodyPr>
+          <a:lstStyle/>
+          <a:p>
+            <a:pPr algn="r">
+              <a:defRPr sz="950">
+                <a:solidFill>
+                  <a:srgbClr val="64748B"/>
+                </a:solidFill>
+              </a:defRPr>
+            </a:pPr>
+            <a:r>
+              <a:t>Dept. of CSE, VJCET</a:t>
             </a:r>
           </a:p>
         </p:txBody>
@@ -4416,14 +4654,14 @@
           <a:lstStyle/>
           <a:p>
             <a:pPr>
-              <a:defRPr b="1" sz="2300">
+              <a:defRPr b="1" sz="2100">
                 <a:solidFill>
                   <a:srgbClr val="F8FAFC"/>
                 </a:solidFill>
               </a:defRPr>
             </a:pPr>
             <a:r>
-              <a:t>3.7.3 Hidden vs Exposed Terminals &amp; RTS/CTS Handshake</a:t>
+              <a:t>🎯 Exam Booster &amp; Review: IEEE 802.11 Wireless LANs</a:t>
             </a:r>
           </a:p>
         </p:txBody>
@@ -4458,7 +4696,7 @@
               </a:defRPr>
             </a:pPr>
             <a:r>
-              <a:t>M3.7 RTS/CTS MECHANISM</a:t>
+              <a:t>M3.7</a:t>
             </a:r>
           </a:p>
         </p:txBody>
@@ -4471,18 +4709,18 @@
         </p:nvSpPr>
         <p:spPr>
           <a:xfrm>
-            <a:off x="731520" y="1280160"/>
-            <a:ext cx="5212080" cy="4846320"/>
+            <a:off x="731520" y="1234440"/>
+            <a:ext cx="5303520" cy="4892040"/>
           </a:xfrm>
           <a:prstGeom prst="roundRect">
             <a:avLst/>
           </a:prstGeom>
           <a:solidFill>
-            <a:srgbClr val="F1F5F9"/>
+            <a:srgbClr val="FEF3C7"/>
           </a:solidFill>
           <a:ln w="19050">
             <a:solidFill>
-              <a:srgbClr val="0E7490"/>
+              <a:srgbClr val="D97706"/>
             </a:solidFill>
           </a:ln>
         </p:spPr>
@@ -4516,8 +4754,8 @@
         </p:nvSpPr>
         <p:spPr>
           <a:xfrm>
-            <a:off x="914400" y="1417320"/>
-            <a:ext cx="4846320" cy="4572000"/>
+            <a:off x="914400" y="1371600"/>
+            <a:ext cx="4937760" cy="4572000"/>
           </a:xfrm>
           <a:prstGeom prst="rect">
             <a:avLst/>
@@ -4532,76 +4770,61 @@
           <a:p>
             <a:pPr>
               <a:spcAft>
-                <a:spcPts val="1200"/>
+                <a:spcPts val="1000"/>
               </a:spcAft>
-              <a:defRPr b="1" sz="1600">
-                <a:solidFill>
-                  <a:srgbClr val="0F1E4A"/>
-                </a:solidFill>
-              </a:defRPr>
-            </a:pPr>
-            <a:r>
-              <a:t>Hidden Terminal Problem (Solved by RTS/CTS)</a:t>
+              <a:defRPr b="1" sz="1450">
+                <a:solidFill>
+                  <a:srgbClr val="D97706"/>
+                </a:solidFill>
+              </a:defRPr>
+            </a:pPr>
+            <a:r>
+              <a:t>📚 KTU High-Yield Questions (K3 Apply)</a:t>
             </a:r>
           </a:p>
           <a:p>
             <a:pPr>
               <a:spcAft>
-                <a:spcPts val="600"/>
+                <a:spcPts val="700"/>
               </a:spcAft>
-              <a:defRPr sz="1250">
-                <a:solidFill>
-                  <a:srgbClr val="1E293B"/>
-                </a:solidFill>
-              </a:defRPr>
-            </a:pPr>
-            <a:r>
-              <a:t>• Scenario: Station A and C both communicate with AP B, but A and C cannot hear each other</a:t>
+              <a:defRPr sz="1200">
+                <a:solidFill>
+                  <a:srgbClr val="0F172A"/>
+                </a:solidFill>
+              </a:defRPr>
+            </a:pPr>
+            <a:r>
+              <a:t>Q: Explain the Hidden Terminal and Exposed Terminal problems in Wireless LANs. How does CSMA/CA with RTS/CTS resolve them? (8 Marks)</a:t>
             </a:r>
           </a:p>
           <a:p>
             <a:pPr>
               <a:spcAft>
-                <a:spcPts val="600"/>
+                <a:spcPts val="700"/>
               </a:spcAft>
-              <a:defRPr sz="1250">
-                <a:solidFill>
-                  <a:srgbClr val="1E293B"/>
-                </a:solidFill>
-              </a:defRPr>
-            </a:pPr>
-            <a:r>
-              <a:t>• Problem: Simultaneous transmissions from A and C collide at B</a:t>
+              <a:defRPr sz="1200">
+                <a:solidFill>
+                  <a:srgbClr val="0F172A"/>
+                </a:solidFill>
+              </a:defRPr>
+            </a:pPr>
+            <a:r>
+              <a:t>Q: Explain the timing relationships between SIFS, PIFS, and DIFS in IEEE 802.11 CSMA/CA with a neat timing diagram. (7 Marks)</a:t>
             </a:r>
           </a:p>
           <a:p>
             <a:pPr>
               <a:spcAft>
-                <a:spcPts val="600"/>
+                <a:spcPts val="700"/>
               </a:spcAft>
-              <a:defRPr sz="1250">
-                <a:solidFill>
-                  <a:srgbClr val="1E293B"/>
-                </a:solidFill>
-              </a:defRPr>
-            </a:pPr>
-            <a:r>
-              <a:t>• Solution: A sends RTS $\to$ B replies with CTS (heard by C) $\to$ C sets NAV and stays silent</a:t>
-            </a:r>
-          </a:p>
-          <a:p>
-            <a:pPr>
-              <a:spcAft>
-                <a:spcPts val="600"/>
-              </a:spcAft>
-              <a:defRPr sz="1250">
-                <a:solidFill>
-                  <a:srgbClr val="1E293B"/>
-                </a:solidFill>
-              </a:defRPr>
-            </a:pPr>
-            <a:r>
-              <a:t>• Handshake: RTS (20B) $\to$ CTS (14B) $\to$ DATA $\to$ ACK</a:t>
+              <a:defRPr sz="1200">
+                <a:solidFill>
+                  <a:srgbClr val="0F172A"/>
+                </a:solidFill>
+              </a:defRPr>
+            </a:pPr>
+            <a:r>
+              <a:t>Q: Explain the four MAC address fields in the IEEE 802.11 frame format. When is Address 4 used? (6 Marks)</a:t>
             </a:r>
           </a:p>
         </p:txBody>
@@ -4614,8 +4837,8 @@
         </p:nvSpPr>
         <p:spPr>
           <a:xfrm>
-            <a:off x="6309360" y="1280160"/>
-            <a:ext cx="5212080" cy="4846320"/>
+            <a:off x="6309360" y="1234440"/>
+            <a:ext cx="5212080" cy="4892040"/>
           </a:xfrm>
           <a:prstGeom prst="roundRect">
             <a:avLst/>
@@ -4625,7 +4848,7 @@
           </a:solidFill>
           <a:ln w="19050">
             <a:solidFill>
-              <a:srgbClr val="0F1E4A"/>
+              <a:srgbClr val="0E7490"/>
             </a:solidFill>
           </a:ln>
         </p:spPr>
@@ -4659,7 +4882,7 @@
         </p:nvSpPr>
         <p:spPr>
           <a:xfrm>
-            <a:off x="6492240" y="1417320"/>
+            <a:off x="6492240" y="1371600"/>
             <a:ext cx="4846320" cy="4572000"/>
           </a:xfrm>
           <a:prstGeom prst="rect">
@@ -4675,16 +4898,16 @@
           <a:p>
             <a:pPr>
               <a:spcAft>
-                <a:spcPts val="1200"/>
+                <a:spcPts val="1000"/>
               </a:spcAft>
-              <a:defRPr b="1" sz="1600">
+              <a:defRPr b="1" sz="1450">
                 <a:solidFill>
                   <a:srgbClr val="0E7490"/>
                 </a:solidFill>
               </a:defRPr>
             </a:pPr>
             <a:r>
-              <a:t>Exposed Terminal Problem</a:t>
+              <a:t>💡 Critical Conceptual Takeaways</a:t>
             </a:r>
           </a:p>
           <a:p>
@@ -4692,14 +4915,14 @@
               <a:spcAft>
                 <a:spcPts val="600"/>
               </a:spcAft>
-              <a:defRPr sz="1250">
-                <a:solidFill>
-                  <a:srgbClr val="1E293B"/>
-                </a:solidFill>
-              </a:defRPr>
-            </a:pPr>
-            <a:r>
-              <a:t>• Scenario: B transmits to A; C wants to transmit to D (outside B's range)</a:t>
+              <a:defRPr sz="1200">
+                <a:solidFill>
+                  <a:srgbClr val="0F172A"/>
+                </a:solidFill>
+              </a:defRPr>
+            </a:pPr>
+            <a:r>
+              <a:t>✔ Wireless radios cannot detect collisions while transmitting; hence Wi-Fi uses collision avoidance (CSMA/CA).</a:t>
             </a:r>
           </a:p>
           <a:p>
@@ -4707,14 +4930,14 @@
               <a:spcAft>
                 <a:spcPts val="600"/>
               </a:spcAft>
-              <a:defRPr sz="1250">
-                <a:solidFill>
-                  <a:srgbClr val="1E293B"/>
-                </a:solidFill>
-              </a:defRPr>
-            </a:pPr>
-            <a:r>
-              <a:t>• Problem: C senses carrier from B and unnecessarily delays transmitting to D even though no collision would occur at A</a:t>
+              <a:defRPr sz="1200">
+                <a:solidFill>
+                  <a:srgbClr val="0F172A"/>
+                </a:solidFill>
+              </a:defRPr>
+            </a:pPr>
+            <a:r>
+              <a:t>✔ RTS and CTS frames carry NAV reservation timers to silence hidden nodes.</a:t>
             </a:r>
           </a:p>
           <a:p>
@@ -4722,14 +4945,14 @@
               <a:spcAft>
                 <a:spcPts val="600"/>
               </a:spcAft>
-              <a:defRPr sz="1250">
-                <a:solidFill>
-                  <a:srgbClr val="1E293B"/>
-                </a:solidFill>
-              </a:defRPr>
-            </a:pPr>
-            <a:r>
-              <a:t>• Resolution: Directional antennas or spatial reuse techniques in modern Wi-Fi 6 (BSS Coloring)</a:t>
+              <a:defRPr sz="1200">
+                <a:solidFill>
+                  <a:srgbClr val="0F172A"/>
+                </a:solidFill>
+              </a:defRPr>
+            </a:pPr>
+            <a:r>
+              <a:t>✔ Address 4 is populated only when frames are bridged between two wireless APs in WDS mode.</a:t>
             </a:r>
           </a:p>
         </p:txBody>
@@ -4742,8 +4965,8 @@
         </p:nvSpPr>
         <p:spPr>
           <a:xfrm>
-            <a:off x="731520" y="6309360"/>
-            <a:ext cx="10789920" cy="365760"/>
+            <a:off x="731520" y="6327648"/>
+            <a:ext cx="10789920" cy="320040"/>
           </a:xfrm>
           <a:prstGeom prst="rect">
             <a:avLst/>
@@ -4765,6 +4988,41 @@
             </a:pPr>
             <a:r>
               <a:t>PCCST501 Computer Networks | KTU 2024 Scheme | Prof. Anju Markose | Assistant Professor, Dept. of CSE | VJCET</a:t>
+            </a:r>
+          </a:p>
+        </p:txBody>
+      </p:sp>
+      <p:sp>
+        <p:nvSpPr>
+          <p:cNvPr id="11" name="TextBox 10"/>
+          <p:cNvSpPr txBox="1"/>
+          <p:nvPr/>
+        </p:nvSpPr>
+        <p:spPr>
+          <a:xfrm>
+            <a:off x="6858000" y="6327648"/>
+            <a:ext cx="4572000" cy="320040"/>
+          </a:xfrm>
+          <a:prstGeom prst="rect">
+            <a:avLst/>
+          </a:prstGeom>
+          <a:noFill/>
+        </p:spPr>
+        <p:txBody>
+          <a:bodyPr wrap="none">
+            <a:spAutoFit/>
+          </a:bodyPr>
+          <a:lstStyle/>
+          <a:p>
+            <a:pPr algn="r">
+              <a:defRPr sz="950">
+                <a:solidFill>
+                  <a:srgbClr val="64748B"/>
+                </a:solidFill>
+              </a:defRPr>
+            </a:pPr>
+            <a:r>
+              <a:t>Dept. of CSE, VJCET</a:t>
             </a:r>
           </a:p>
         </p:txBody>
